--- a/entregas/creditos_cursos_4_5/C5_M1_01_Scrum_que_es_de_donde_viene_COMPLETO_con_creditos.pptx
+++ b/entregas/creditos_cursos_4_5/C5_M1_01_Scrum_que_es_de_donde_viene_COMPLETO_con_creditos.pptx
@@ -16609,7 +16609,7 @@
                       </a:pPr>
                       <a:r>
                         <a:rPr b="1" lang="es-CO" sz="950" u="none" cap="none" strike="noStrike"/>
-                        <a:t>Coordinación general</a:t>
+                        <a:t>Coordinación general:</a:t>
                       </a:r>
                       <a:endParaRPr b="1" sz="1100" u="none" cap="none" strike="noStrike">
                         <a:latin typeface="Arial"/>
@@ -16686,7 +16686,7 @@
                       </a:pPr>
                       <a:r>
                         <a:rPr b="1" lang="es-CO" sz="950" u="none" cap="none" strike="noStrike"/>
-                        <a:t>Experto temático</a:t>
+                        <a:t>Experto temático:</a:t>
                       </a:r>
                       <a:endParaRPr b="1" sz="1100" u="none" cap="none" strike="noStrike">
                         <a:latin typeface="Arial"/>
@@ -16763,7 +16763,7 @@
                       </a:pPr>
                       <a:r>
                         <a:rPr b="1" lang="es-CO" sz="950" u="none" cap="none" strike="noStrike"/>
-                        <a:t>Diseñador de la experiencia virtual de aprendizaje</a:t>
+                        <a:t>Diseñador de la experiencia virtual de aprendizaje:</a:t>
                       </a:r>
                       <a:endParaRPr b="1" sz="1100" u="none" cap="none" strike="noStrike">
                         <a:latin typeface="Arial"/>
@@ -16840,7 +16840,7 @@
                       </a:pPr>
                       <a:r>
                         <a:rPr b="1" lang="es-CO" sz="950" u="none" cap="none" strike="noStrike"/>
-                        <a:t>Corrección de estilo</a:t>
+                        <a:t>Corrección de estilo:</a:t>
                       </a:r>
                       <a:endParaRPr b="1" sz="1100" u="none" cap="none" strike="noStrike">
                         <a:latin typeface="Arial"/>
@@ -16917,7 +16917,7 @@
                       </a:pPr>
                       <a:r>
                         <a:rPr b="1" lang="es-CO" sz="950" u="none" cap="none" strike="noStrike"/>
-                        <a:t>Validación pedagógica</a:t>
+                        <a:t>Validación pedagógica:</a:t>
                       </a:r>
                       <a:endParaRPr b="1" sz="1100" u="none" cap="none" strike="noStrike">
                         <a:latin typeface="Arial"/>
@@ -16994,7 +16994,7 @@
                       </a:pPr>
                       <a:r>
                         <a:rPr b="1" lang="es-CO" sz="950" u="none" cap="none" strike="noStrike"/>
-                        <a:t>Diseño gráfico</a:t>
+                        <a:t>Diseño gráfico:</a:t>
                       </a:r>
                       <a:endParaRPr b="1" sz="1100" u="none" cap="none" strike="noStrike">
                         <a:latin typeface="Arial"/>
@@ -17071,7 +17071,7 @@
                       </a:pPr>
                       <a:r>
                         <a:rPr b="1" lang="es-CO" sz="950" u="none" cap="none" strike="noStrike"/>
-                        <a:t>Disposición y ensamble</a:t>
+                        <a:t>Disposición y ensamble:</a:t>
                       </a:r>
                       <a:endParaRPr b="1" sz="1100" u="none" cap="none" strike="noStrike">
                         <a:latin typeface="Arial"/>
